--- a/Presentacion_Ttech.pptx
+++ b/Presentacion_Ttech.pptx
@@ -250,8 +250,11 @@
     </a:lvl9pPr>
   </p:defaultTextStyle>
   <p:extLst>
+    <p:ext uri="{EFAFB233-063F-42B5-8137-9DF3F51BA10A}">
+      <p15:sldGuideLst xmlns:p15="http://schemas.microsoft.com/office/powerpoint/2012/main"/>
+    </p:ext>
     <p:ext uri="GoogleSlidesCustomDataVersion2">
-      <go:slidesCustomData xmlns:go="http://customooxmlschemas.google.com/" xmlns:ahyp="http://schemas.microsoft.com/office/drawing/2018/hyperlinkcolor" xmlns:p15="http://schemas.microsoft.com/office/powerpoint/2012/main" xmlns:p14="http://schemas.microsoft.com/office/powerpoint/2010/main" xmlns:com="http://schemas.openxmlformats.org/drawingml/2006/compatibility" xmlns:pvml="urn:schemas-microsoft-com:office:powerpoint" xmlns:v="urn:schemas-microsoft-com:vml" xmlns:o="urn:schemas-microsoft-com:office:office" xmlns:dgm="http://schemas.openxmlformats.org/drawingml/2006/diagram" xmlns:c="http://schemas.openxmlformats.org/drawingml/2006/chart" xmlns:mv="urn:schemas-microsoft-com:mac:vml" xmlns:mc="http://schemas.openxmlformats.org/markup-compatibility/2006" xmlns="" r:id="rId14" roundtripDataSignature="AMtx7mg7Fl9e43d7X1YGYggzXJfrCDos1g=="/>
+      <go:slidesCustomData xmlns="" xmlns:mc="http://schemas.openxmlformats.org/markup-compatibility/2006" xmlns:mv="urn:schemas-microsoft-com:mac:vml" xmlns:c="http://schemas.openxmlformats.org/drawingml/2006/chart" xmlns:dgm="http://schemas.openxmlformats.org/drawingml/2006/diagram" xmlns:o="urn:schemas-microsoft-com:office:office" xmlns:v="urn:schemas-microsoft-com:vml" xmlns:pvml="urn:schemas-microsoft-com:office:powerpoint" xmlns:com="http://schemas.openxmlformats.org/drawingml/2006/compatibility" xmlns:p14="http://schemas.microsoft.com/office/powerpoint/2010/main" xmlns:p15="http://schemas.microsoft.com/office/powerpoint/2012/main" xmlns:ahyp="http://schemas.microsoft.com/office/drawing/2018/hyperlinkcolor" xmlns:go="http://customooxmlschemas.google.com/" r:id="rId14" roundtripDataSignature="AMtx7mg7Fl9e43d7X1YGYggzXJfrCDos1g=="/>
     </p:ext>
   </p:extLst>
 </p:presentation>
@@ -8628,6 +8631,18 @@
               <a:buNone/>
             </a:pPr>
             <a:r>
+              <a:rPr lang="en-US" sz="1200">
+                <a:solidFill>
+                  <a:srgbClr val="64748B"/>
+                </a:solidFill>
+                <a:latin typeface="Calibri"/>
+                <a:ea typeface="Calibri"/>
+                <a:cs typeface="Calibri"/>
+                <a:sym typeface="Calibri"/>
+              </a:rPr>
+              <a:t>10</a:t>
+            </a:r>
+            <a:r>
               <a:rPr lang="en-US" sz="1200" b="0" i="0" u="none" strike="noStrike" cap="none">
                 <a:solidFill>
                   <a:srgbClr val="64748B"/>
@@ -8637,9 +8652,69 @@
                 <a:cs typeface="Calibri"/>
                 <a:sym typeface="Calibri"/>
               </a:rPr>
-              <a:t>5 consultas SQL: JOINs, CTEs, funciones agregadas</a:t>
+              <a:t> </a:t>
             </a:r>
-            <a:endParaRPr sz="1200" b="0" i="0" u="none" strike="noStrike" cap="none">
+            <a:r>
+              <a:rPr lang="en-US" sz="1200" b="0" i="0" u="none" strike="noStrike" cap="none" dirty="0" err="1">
+                <a:solidFill>
+                  <a:srgbClr val="64748B"/>
+                </a:solidFill>
+                <a:latin typeface="Calibri"/>
+                <a:ea typeface="Calibri"/>
+                <a:cs typeface="Calibri"/>
+                <a:sym typeface="Calibri"/>
+              </a:rPr>
+              <a:t>consultas</a:t>
+            </a:r>
+            <a:r>
+              <a:rPr lang="en-US" sz="1200" b="0" i="0" u="none" strike="noStrike" cap="none" dirty="0">
+                <a:solidFill>
+                  <a:srgbClr val="64748B"/>
+                </a:solidFill>
+                <a:latin typeface="Calibri"/>
+                <a:ea typeface="Calibri"/>
+                <a:cs typeface="Calibri"/>
+                <a:sym typeface="Calibri"/>
+              </a:rPr>
+              <a:t> SQL: JOINs, CTEs, </a:t>
+            </a:r>
+            <a:r>
+              <a:rPr lang="en-US" sz="1200" b="0" i="0" u="none" strike="noStrike" cap="none" dirty="0" err="1">
+                <a:solidFill>
+                  <a:srgbClr val="64748B"/>
+                </a:solidFill>
+                <a:latin typeface="Calibri"/>
+                <a:ea typeface="Calibri"/>
+                <a:cs typeface="Calibri"/>
+                <a:sym typeface="Calibri"/>
+              </a:rPr>
+              <a:t>funciones</a:t>
+            </a:r>
+            <a:r>
+              <a:rPr lang="en-US" sz="1200" b="0" i="0" u="none" strike="noStrike" cap="none" dirty="0">
+                <a:solidFill>
+                  <a:srgbClr val="64748B"/>
+                </a:solidFill>
+                <a:latin typeface="Calibri"/>
+                <a:ea typeface="Calibri"/>
+                <a:cs typeface="Calibri"/>
+                <a:sym typeface="Calibri"/>
+              </a:rPr>
+              <a:t> </a:t>
+            </a:r>
+            <a:r>
+              <a:rPr lang="en-US" sz="1200" b="0" i="0" u="none" strike="noStrike" cap="none" dirty="0" err="1">
+                <a:solidFill>
+                  <a:srgbClr val="64748B"/>
+                </a:solidFill>
+                <a:latin typeface="Calibri"/>
+                <a:ea typeface="Calibri"/>
+                <a:cs typeface="Calibri"/>
+                <a:sym typeface="Calibri"/>
+              </a:rPr>
+              <a:t>agregadas</a:t>
+            </a:r>
+            <a:endParaRPr sz="1200" b="0" i="0" u="none" strike="noStrike" cap="none" dirty="0">
               <a:solidFill>
                 <a:schemeClr val="dk1"/>
               </a:solidFill>
